--- a/outputs/presentations/SE1944_research_proposal_defense.pptx
+++ b/outputs/presentations/SE1944_research_proposal_defense.pptx
@@ -2244,7 +2244,7 @@
                   <a:srgbClr val="CBD5E1"/>
                 </a:solidFill>
               </a:rPr>
-              <a:t>Ngày bảo vệ: cập nhật theo lịch thực tế</a:t>
+              <a:t>Ngày bảo vệ: 23/06/2026</a:t>
             </a:r>
             <a:endParaRPr lang="en-US" sz="1200" dirty="0">
               <a:solidFill>
@@ -6982,7 +6982,7 @@
                         <a:t>T</a:t>
                       </a:r>
                       <a:r>
-                        <a:rPr lang="" altLang="en-US" sz="1200" dirty="0">
+                        <a:rPr lang="en-US" altLang="en-US" sz="1200" dirty="0">
                           <a:solidFill>
                             <a:srgbClr val="1B2633"/>
                           </a:solidFill>
@@ -6998,7 +6998,7 @@
                         <a:t>ơng </a:t>
                       </a:r>
                       <a:r>
-                        <a:rPr lang="" altLang="en-US" sz="1200" dirty="0">
+                        <a:rPr lang="en-US" altLang="en-US" sz="1200" dirty="0">
                           <a:solidFill>
                             <a:srgbClr val="1B2633"/>
                           </a:solidFill>
@@ -9010,8 +9010,8 @@
         </p:nvSpPr>
         <p:spPr>
           <a:xfrm>
-            <a:off x="502920" y="2148840"/>
-            <a:ext cx="1572768" cy="868680"/>
+            <a:off x="709930" y="1915795"/>
+            <a:ext cx="2117090" cy="1170940"/>
           </a:xfrm>
           <a:prstGeom prst="roundRect">
             <a:avLst>
@@ -9044,8 +9044,8 @@
         </p:nvSpPr>
         <p:spPr>
           <a:xfrm>
-            <a:off x="612648" y="2313432"/>
-            <a:ext cx="219456" cy="164592"/>
+            <a:off x="819785" y="2080260"/>
+            <a:ext cx="295275" cy="220980"/>
           </a:xfrm>
           <a:prstGeom prst="rect">
             <a:avLst/>
@@ -9060,14 +9060,14 @@
               <a:buNone/>
             </a:pPr>
             <a:r>
-              <a:rPr lang="en-US" sz="1400" b="1" dirty="0">
+              <a:rPr lang="en-US" sz="2000" b="1" dirty="0">
                 <a:solidFill>
                   <a:srgbClr val="0B6F73"/>
                 </a:solidFill>
               </a:rPr>
               <a:t>1</a:t>
             </a:r>
-            <a:endParaRPr lang="en-US" sz="1400" b="1" dirty="0">
+            <a:endParaRPr lang="en-US" sz="2000" b="1" dirty="0">
               <a:solidFill>
                 <a:srgbClr val="0B6F73"/>
               </a:solidFill>
@@ -9083,8 +9083,8 @@
         </p:nvSpPr>
         <p:spPr>
           <a:xfrm>
-            <a:off x="941832" y="2295144"/>
-            <a:ext cx="960120" cy="146304"/>
+            <a:off x="1193800" y="2103755"/>
+            <a:ext cx="1292225" cy="196215"/>
           </a:xfrm>
           <a:prstGeom prst="rect">
             <a:avLst/>
@@ -9101,14 +9101,14 @@
               <a:buNone/>
             </a:pPr>
             <a:r>
-              <a:rPr lang="en-US" sz="1000" b="1" dirty="0">
+              <a:rPr lang="en-US" sz="1400" b="1" dirty="0">
                 <a:solidFill>
                   <a:srgbClr val="0F2742"/>
                 </a:solidFill>
               </a:rPr>
               <a:t>Lọc Dataset</a:t>
             </a:r>
-            <a:endParaRPr lang="en-US" sz="1000" b="1" dirty="0">
+            <a:endParaRPr lang="en-US" sz="1400" b="1" dirty="0">
               <a:solidFill>
                 <a:srgbClr val="0F2742"/>
               </a:solidFill>
@@ -9124,8 +9124,8 @@
         </p:nvSpPr>
         <p:spPr>
           <a:xfrm>
-            <a:off x="941832" y="2578608"/>
-            <a:ext cx="914400" cy="164592"/>
+            <a:off x="1193800" y="2498725"/>
+            <a:ext cx="1230630" cy="220980"/>
           </a:xfrm>
           <a:prstGeom prst="rect">
             <a:avLst/>
@@ -9134,7 +9134,7 @@
         </p:spPr>
         <p:txBody>
           <a:bodyPr wrap="square" lIns="0" tIns="0" rIns="0" bIns="0" rtlCol="0" anchor="ctr">
-            <a:normAutofit/>
+            <a:noAutofit/>
           </a:bodyPr>
           <a:lstStyle/>
           <a:p>
@@ -9142,14 +9142,14 @@
               <a:buNone/>
             </a:pPr>
             <a:r>
-              <a:rPr lang="en-US" sz="920" dirty="0">
+              <a:rPr lang="en-US" sz="1400" dirty="0">
                 <a:solidFill>
                   <a:srgbClr val="52616F"/>
                 </a:solidFill>
               </a:rPr>
               <a:t>N=50; CC 5-16</a:t>
             </a:r>
-            <a:endParaRPr lang="en-US" sz="920" dirty="0">
+            <a:endParaRPr lang="en-US" sz="1400" dirty="0">
               <a:solidFill>
                 <a:srgbClr val="52616F"/>
               </a:solidFill>
@@ -9165,8 +9165,8 @@
         </p:nvSpPr>
         <p:spPr>
           <a:xfrm>
-            <a:off x="2404872" y="3351530"/>
-            <a:ext cx="1572768" cy="868680"/>
+            <a:off x="1786255" y="3422015"/>
+            <a:ext cx="2117090" cy="1170940"/>
           </a:xfrm>
           <a:prstGeom prst="roundRect">
             <a:avLst>
@@ -9199,8 +9199,8 @@
         </p:nvSpPr>
         <p:spPr>
           <a:xfrm>
-            <a:off x="2514600" y="3593592"/>
-            <a:ext cx="219456" cy="164592"/>
+            <a:off x="1896110" y="3663950"/>
+            <a:ext cx="295275" cy="220980"/>
           </a:xfrm>
           <a:prstGeom prst="rect">
             <a:avLst/>
@@ -9215,14 +9215,14 @@
               <a:buNone/>
             </a:pPr>
             <a:r>
-              <a:rPr lang="en-US" sz="1400" b="1" dirty="0">
+              <a:rPr lang="en-US" sz="2000" b="1" dirty="0">
                 <a:solidFill>
                   <a:srgbClr val="0B6F73"/>
                 </a:solidFill>
               </a:rPr>
               <a:t>2</a:t>
             </a:r>
-            <a:endParaRPr lang="en-US" sz="1400" b="1" dirty="0">
+            <a:endParaRPr lang="en-US" sz="2000" b="1" dirty="0">
               <a:solidFill>
                 <a:srgbClr val="0B6F73"/>
               </a:solidFill>
@@ -9238,8 +9238,8 @@
         </p:nvSpPr>
         <p:spPr>
           <a:xfrm>
-            <a:off x="2843530" y="3575050"/>
-            <a:ext cx="936625" cy="146050"/>
+            <a:off x="2225040" y="3645535"/>
+            <a:ext cx="1463675" cy="196215"/>
           </a:xfrm>
           <a:prstGeom prst="rect">
             <a:avLst/>
@@ -9256,14 +9256,14 @@
               <a:buNone/>
             </a:pPr>
             <a:r>
-              <a:rPr lang="en-US" sz="1000" b="1" dirty="0">
+              <a:rPr lang="en-US" sz="1400" b="1" dirty="0">
                 <a:solidFill>
                   <a:srgbClr val="0F2742"/>
                 </a:solidFill>
               </a:rPr>
               <a:t>LLM Prompting</a:t>
             </a:r>
-            <a:endParaRPr lang="en-US" sz="1000" b="1" dirty="0">
+            <a:endParaRPr lang="en-US" sz="1400" b="1" dirty="0">
               <a:solidFill>
                 <a:srgbClr val="0F2742"/>
               </a:solidFill>
@@ -9279,8 +9279,8 @@
         </p:nvSpPr>
         <p:spPr>
           <a:xfrm>
-            <a:off x="2866009" y="3841623"/>
-            <a:ext cx="914400" cy="164592"/>
+            <a:off x="2225040" y="4075430"/>
+            <a:ext cx="1230630" cy="220980"/>
           </a:xfrm>
           <a:prstGeom prst="rect">
             <a:avLst/>
@@ -9297,14 +9297,14 @@
               <a:buNone/>
             </a:pPr>
             <a:r>
-              <a:rPr lang="en-US" sz="920" dirty="0">
+              <a:rPr lang="en-US" sz="1400" dirty="0">
                 <a:solidFill>
                   <a:srgbClr val="52616F"/>
                 </a:solidFill>
               </a:rPr>
               <a:t>GPT-4o-mini; temp=0</a:t>
             </a:r>
-            <a:endParaRPr lang="en-US" sz="920" dirty="0">
+            <a:endParaRPr lang="en-US" sz="1400" dirty="0">
               <a:solidFill>
                 <a:srgbClr val="52616F"/>
               </a:solidFill>
@@ -9320,8 +9320,8 @@
         </p:nvSpPr>
         <p:spPr>
           <a:xfrm>
-            <a:off x="4306824" y="2148840"/>
-            <a:ext cx="1572768" cy="868680"/>
+            <a:off x="4513580" y="1915795"/>
+            <a:ext cx="2117090" cy="1170940"/>
           </a:xfrm>
           <a:prstGeom prst="roundRect">
             <a:avLst>
@@ -9354,8 +9354,8 @@
         </p:nvSpPr>
         <p:spPr>
           <a:xfrm>
-            <a:off x="4416552" y="2313432"/>
-            <a:ext cx="219456" cy="164592"/>
+            <a:off x="4623435" y="2080260"/>
+            <a:ext cx="295275" cy="220980"/>
           </a:xfrm>
           <a:prstGeom prst="rect">
             <a:avLst/>
@@ -9370,14 +9370,14 @@
               <a:buNone/>
             </a:pPr>
             <a:r>
-              <a:rPr lang="en-US" sz="1400" b="1" dirty="0">
+              <a:rPr lang="en-US" sz="2000" b="1" dirty="0">
                 <a:solidFill>
                   <a:srgbClr val="0B6F73"/>
                 </a:solidFill>
               </a:rPr>
               <a:t>3</a:t>
             </a:r>
-            <a:endParaRPr lang="en-US" sz="1400" b="1" dirty="0">
+            <a:endParaRPr lang="en-US" sz="2000" b="1" dirty="0">
               <a:solidFill>
                 <a:srgbClr val="0B6F73"/>
               </a:solidFill>
@@ -9393,8 +9393,8 @@
         </p:nvSpPr>
         <p:spPr>
           <a:xfrm>
-            <a:off x="4745736" y="2295144"/>
-            <a:ext cx="960120" cy="146304"/>
+            <a:off x="5009515" y="2104390"/>
+            <a:ext cx="1292225" cy="196215"/>
           </a:xfrm>
           <a:prstGeom prst="rect">
             <a:avLst/>
@@ -9411,14 +9411,14 @@
               <a:buNone/>
             </a:pPr>
             <a:r>
-              <a:rPr lang="en-US" sz="1000" b="1" dirty="0">
+              <a:rPr lang="en-US" sz="1400" b="1" dirty="0">
                 <a:solidFill>
                   <a:srgbClr val="0F2742"/>
                 </a:solidFill>
               </a:rPr>
               <a:t>Hậu xử lý</a:t>
             </a:r>
-            <a:endParaRPr lang="en-US" sz="1000" b="1" dirty="0">
+            <a:endParaRPr lang="en-US" sz="1400" b="1" dirty="0">
               <a:solidFill>
                 <a:srgbClr val="0F2742"/>
               </a:solidFill>
@@ -9434,8 +9434,8 @@
         </p:nvSpPr>
         <p:spPr>
           <a:xfrm>
-            <a:off x="4745736" y="2578608"/>
-            <a:ext cx="914400" cy="164592"/>
+            <a:off x="4842510" y="2498725"/>
+            <a:ext cx="1459230" cy="172720"/>
           </a:xfrm>
           <a:prstGeom prst="rect">
             <a:avLst/>
@@ -9444,7 +9444,7 @@
         </p:spPr>
         <p:txBody>
           <a:bodyPr wrap="square" lIns="0" tIns="0" rIns="0" bIns="0" rtlCol="0" anchor="ctr">
-            <a:normAutofit/>
+            <a:noAutofit/>
           </a:bodyPr>
           <a:lstStyle/>
           <a:p>
@@ -9452,14 +9452,14 @@
               <a:buNone/>
             </a:pPr>
             <a:r>
-              <a:rPr lang="en-US" sz="920" dirty="0">
+              <a:rPr lang="en-US" sz="1400" dirty="0">
                 <a:solidFill>
                   <a:srgbClr val="52616F"/>
                 </a:solidFill>
               </a:rPr>
               <a:t>Tách code JUnit 4</a:t>
             </a:r>
-            <a:endParaRPr lang="en-US" sz="920" dirty="0">
+            <a:endParaRPr lang="en-US" sz="1400" dirty="0">
               <a:solidFill>
                 <a:srgbClr val="52616F"/>
               </a:solidFill>
@@ -9475,8 +9475,8 @@
         </p:nvSpPr>
         <p:spPr>
           <a:xfrm>
-            <a:off x="6208776" y="3429000"/>
-            <a:ext cx="1572768" cy="868680"/>
+            <a:off x="5590540" y="3499485"/>
+            <a:ext cx="2117090" cy="1170940"/>
           </a:xfrm>
           <a:prstGeom prst="roundRect">
             <a:avLst>
@@ -9509,8 +9509,8 @@
         </p:nvSpPr>
         <p:spPr>
           <a:xfrm>
-            <a:off x="6318504" y="3593592"/>
-            <a:ext cx="219456" cy="164592"/>
+            <a:off x="5699760" y="3663950"/>
+            <a:ext cx="295275" cy="220980"/>
           </a:xfrm>
           <a:prstGeom prst="rect">
             <a:avLst/>
@@ -9525,14 +9525,14 @@
               <a:buNone/>
             </a:pPr>
             <a:r>
-              <a:rPr lang="en-US" sz="1400" b="1" dirty="0">
+              <a:rPr lang="en-US" sz="2000" b="1" dirty="0">
                 <a:solidFill>
                   <a:srgbClr val="0B6F73"/>
                 </a:solidFill>
               </a:rPr>
               <a:t>4</a:t>
             </a:r>
-            <a:endParaRPr lang="en-US" sz="1400" b="1" dirty="0">
+            <a:endParaRPr lang="en-US" sz="2000" b="1" dirty="0">
               <a:solidFill>
                 <a:srgbClr val="0B6F73"/>
               </a:solidFill>
@@ -9548,8 +9548,8 @@
         </p:nvSpPr>
         <p:spPr>
           <a:xfrm>
-            <a:off x="6590665" y="3611880"/>
-            <a:ext cx="1144905" cy="146050"/>
+            <a:off x="5995035" y="3685540"/>
+            <a:ext cx="1599565" cy="196215"/>
           </a:xfrm>
           <a:prstGeom prst="rect">
             <a:avLst/>
@@ -9566,14 +9566,14 @@
               <a:buNone/>
             </a:pPr>
             <a:r>
-              <a:rPr lang="en-US" sz="1000" b="1" dirty="0">
+              <a:rPr lang="en-US" sz="1400" b="1" dirty="0">
                 <a:solidFill>
                   <a:srgbClr val="0F2742"/>
                 </a:solidFill>
               </a:rPr>
               <a:t>Compile + Repair</a:t>
             </a:r>
-            <a:endParaRPr lang="en-US" sz="1000" b="1" dirty="0">
+            <a:endParaRPr lang="en-US" sz="1400" b="1" dirty="0">
               <a:solidFill>
                 <a:srgbClr val="0F2742"/>
               </a:solidFill>
@@ -9589,8 +9589,8 @@
         </p:nvSpPr>
         <p:spPr>
           <a:xfrm>
-            <a:off x="6537960" y="3938905"/>
-            <a:ext cx="1097280" cy="164465"/>
+            <a:off x="5910580" y="4114800"/>
+            <a:ext cx="1476375" cy="220980"/>
           </a:xfrm>
           <a:prstGeom prst="rect">
             <a:avLst/>
@@ -9607,14 +9607,14 @@
               <a:buNone/>
             </a:pPr>
             <a:r>
-              <a:rPr lang="en-US" sz="920" dirty="0">
+              <a:rPr lang="en-US" sz="1400" dirty="0">
                 <a:solidFill>
                   <a:srgbClr val="52616F"/>
                 </a:solidFill>
               </a:rPr>
               <a:t>Maven; sửa 1 vòng</a:t>
             </a:r>
-            <a:endParaRPr lang="en-US" sz="920" dirty="0">
+            <a:endParaRPr lang="en-US" sz="1400" dirty="0">
               <a:solidFill>
                 <a:srgbClr val="52616F"/>
               </a:solidFill>
@@ -9630,8 +9630,8 @@
         </p:nvSpPr>
         <p:spPr>
           <a:xfrm>
-            <a:off x="8110728" y="2148840"/>
-            <a:ext cx="1572768" cy="868680"/>
+            <a:off x="8317865" y="1915795"/>
+            <a:ext cx="2117090" cy="1170940"/>
           </a:xfrm>
           <a:prstGeom prst="roundRect">
             <a:avLst>
@@ -9664,8 +9664,8 @@
         </p:nvSpPr>
         <p:spPr>
           <a:xfrm>
-            <a:off x="8220456" y="2313432"/>
-            <a:ext cx="219456" cy="164592"/>
+            <a:off x="8427720" y="2080260"/>
+            <a:ext cx="295275" cy="220980"/>
           </a:xfrm>
           <a:prstGeom prst="rect">
             <a:avLst/>
@@ -9680,14 +9680,14 @@
               <a:buNone/>
             </a:pPr>
             <a:r>
-              <a:rPr lang="en-US" sz="1400" b="1" dirty="0">
+              <a:rPr lang="en-US" sz="2000" b="1" dirty="0">
                 <a:solidFill>
                   <a:srgbClr val="0B6F73"/>
                 </a:solidFill>
               </a:rPr>
               <a:t>5</a:t>
             </a:r>
-            <a:endParaRPr lang="en-US" sz="1400" b="1" dirty="0">
+            <a:endParaRPr lang="en-US" sz="2000" b="1" dirty="0">
               <a:solidFill>
                 <a:srgbClr val="0B6F73"/>
               </a:solidFill>
@@ -9703,8 +9703,8 @@
         </p:nvSpPr>
         <p:spPr>
           <a:xfrm>
-            <a:off x="8549640" y="2295144"/>
-            <a:ext cx="960120" cy="146304"/>
+            <a:off x="8825230" y="2105025"/>
+            <a:ext cx="1292225" cy="196215"/>
           </a:xfrm>
           <a:prstGeom prst="rect">
             <a:avLst/>
@@ -9721,14 +9721,14 @@
               <a:buNone/>
             </a:pPr>
             <a:r>
-              <a:rPr lang="en-US" sz="1000" b="1" dirty="0">
+              <a:rPr lang="en-US" sz="1400" b="1" dirty="0">
                 <a:solidFill>
                   <a:srgbClr val="0F2742"/>
                 </a:solidFill>
               </a:rPr>
               <a:t>Đo metric</a:t>
             </a:r>
-            <a:endParaRPr lang="en-US" sz="1000" b="1" dirty="0">
+            <a:endParaRPr lang="en-US" sz="1400" b="1" dirty="0">
               <a:solidFill>
                 <a:srgbClr val="0F2742"/>
               </a:solidFill>
@@ -9744,8 +9744,8 @@
         </p:nvSpPr>
         <p:spPr>
           <a:xfrm>
-            <a:off x="8549640" y="2578608"/>
-            <a:ext cx="914400" cy="164592"/>
+            <a:off x="8719820" y="2498725"/>
+            <a:ext cx="1230630" cy="220980"/>
           </a:xfrm>
           <a:prstGeom prst="rect">
             <a:avLst/>
@@ -9754,7 +9754,7 @@
         </p:spPr>
         <p:txBody>
           <a:bodyPr wrap="square" lIns="0" tIns="0" rIns="0" bIns="0" rtlCol="0" anchor="ctr">
-            <a:normAutofit/>
+            <a:noAutofit/>
           </a:bodyPr>
           <a:lstStyle/>
           <a:p>
@@ -9762,14 +9762,14 @@
               <a:buNone/>
             </a:pPr>
             <a:r>
-              <a:rPr lang="en-US" sz="920" dirty="0">
+              <a:rPr lang="en-US" sz="1400" dirty="0">
                 <a:solidFill>
                   <a:srgbClr val="52616F"/>
                 </a:solidFill>
               </a:rPr>
               <a:t>JaCoCo + PIT</a:t>
             </a:r>
-            <a:endParaRPr lang="en-US" sz="920" dirty="0">
+            <a:endParaRPr lang="en-US" sz="1400" dirty="0">
               <a:solidFill>
                 <a:srgbClr val="52616F"/>
               </a:solidFill>
@@ -9785,8 +9785,8 @@
         </p:nvSpPr>
         <p:spPr>
           <a:xfrm>
-            <a:off x="10012680" y="3429000"/>
-            <a:ext cx="1572768" cy="868680"/>
+            <a:off x="9394190" y="3499485"/>
+            <a:ext cx="2117090" cy="1170940"/>
           </a:xfrm>
           <a:prstGeom prst="roundRect">
             <a:avLst>
@@ -9819,8 +9819,8 @@
         </p:nvSpPr>
         <p:spPr>
           <a:xfrm>
-            <a:off x="10122408" y="3593592"/>
-            <a:ext cx="219456" cy="164592"/>
+            <a:off x="9504045" y="3663950"/>
+            <a:ext cx="295275" cy="220980"/>
           </a:xfrm>
           <a:prstGeom prst="rect">
             <a:avLst/>
@@ -9835,14 +9835,14 @@
               <a:buNone/>
             </a:pPr>
             <a:r>
-              <a:rPr lang="en-US" sz="1400" b="1" dirty="0">
+              <a:rPr lang="en-US" sz="2000" b="1" dirty="0">
                 <a:solidFill>
                   <a:srgbClr val="0B6F73"/>
                 </a:solidFill>
               </a:rPr>
               <a:t>6</a:t>
             </a:r>
-            <a:endParaRPr lang="en-US" sz="1400" b="1" dirty="0">
+            <a:endParaRPr lang="en-US" sz="2000" b="1" dirty="0">
               <a:solidFill>
                 <a:srgbClr val="0B6F73"/>
               </a:solidFill>
@@ -9858,8 +9858,8 @@
         </p:nvSpPr>
         <p:spPr>
           <a:xfrm>
-            <a:off x="10451592" y="3575304"/>
-            <a:ext cx="960120" cy="146304"/>
+            <a:off x="9942830" y="3695065"/>
+            <a:ext cx="1292225" cy="196215"/>
           </a:xfrm>
           <a:prstGeom prst="rect">
             <a:avLst/>
@@ -9876,14 +9876,14 @@
               <a:buNone/>
             </a:pPr>
             <a:r>
-              <a:rPr lang="en-US" sz="1000" b="1" dirty="0">
+              <a:rPr lang="en-US" sz="1400" b="1" dirty="0">
                 <a:solidFill>
                   <a:srgbClr val="0F2742"/>
                 </a:solidFill>
               </a:rPr>
               <a:t>Thống kê</a:t>
             </a:r>
-            <a:endParaRPr lang="en-US" sz="1000" b="1" dirty="0">
+            <a:endParaRPr lang="en-US" sz="1400" b="1" dirty="0">
               <a:solidFill>
                 <a:srgbClr val="0F2742"/>
               </a:solidFill>
@@ -9899,8 +9899,8 @@
         </p:nvSpPr>
         <p:spPr>
           <a:xfrm>
-            <a:off x="10313035" y="3900805"/>
-            <a:ext cx="1046480" cy="164465"/>
+            <a:off x="9609455" y="4110990"/>
+            <a:ext cx="1793240" cy="220980"/>
           </a:xfrm>
           <a:prstGeom prst="rect">
             <a:avLst/>
@@ -9917,14 +9917,14 @@
               <a:buNone/>
             </a:pPr>
             <a:r>
-              <a:rPr lang="en-US" sz="920" dirty="0">
+              <a:rPr lang="en-US" sz="1400" dirty="0">
                 <a:solidFill>
                   <a:srgbClr val="52616F"/>
                 </a:solidFill>
               </a:rPr>
               <a:t>scipy Wilcoxon/Binomial</a:t>
             </a:r>
-            <a:endParaRPr lang="en-US" sz="920" dirty="0">
+            <a:endParaRPr lang="en-US" sz="1400" dirty="0">
               <a:solidFill>
                 <a:srgbClr val="52616F"/>
               </a:solidFill>
